--- a/docs/pitch/Ariadne_October_Pitch.pptx
+++ b/docs/pitch/Ariadne_October_Pitch.pptx
@@ -1928,11 +1928,11 @@
 In August we showed you ninety-nine percent — on questions we had written ourselves. So we did this properly.
 Two hundred and eighty-eight questions held back from development and never graded until this run. Three ways of answering, graded by two independent models.
 Reading the database's own structure: point six five. Hand-written queries: point four nine. Letting the AI write the query: point four zero. Both graders agree on that order. These are the blind numbers — the honest ones.
-And cost. Same questions: hand-written took four seconds. Letting the AI write the queries took two days. Forty thousand times.
+And cost. Same two hundred and eighty-four questions, same machine: the hand-written path finished in eight seconds. Letting the AI write the queries took three hours — fourteen hundred times — and it came back with evidence on only one question in three.
 But the number that matters most for security is zero. Zero made-up claims — by construction, not by filtering. And every one of two hundred and forty adversarial queries blocked.
-HOW: Never cut this slide. Own the August-to-now change before anyone asks: 'we refuted our own headline and wrote it down' is the most credible sentence in the deck. Point at the top bar when you say 0.65. Say '40,000 times' and stop for a beat. The words 'arm', 'deterministic', 'generic', 'holdout' and 'template cascade' do not appear anywhere in this script — keep it that way.
+HOW: Never cut this slide. Own the August-to-now change before anyone asks: 'we refuted our own headline and wrote it down' is the most credible sentence in the deck. Point at the top bar when you say 0.65. Say 'fourteen hundred times' and stop for a beat. If an engineer asks per question or at what concurrency, it is wall clock on both sides, 24 workers, one machine, and backup B1 has the table. The words 'arm', 'deterministic', 'generic', 'holdout' and 'template cascade' do not appear anywhere in this script — keep it that way.
 IF LONG, CUT: Nothing here. Cut slide 6 instead.
-SOURCES: EXP-2026-09-007 (holdout n=288; grader qwen38-27B-v2; gemma4-31B agrees on ordering) · docs/reports/2026-09-05-full-report.md (cost, 284-question dev half) · EXP-2026-08-016 (240 probes) · EXP-2026-08-014 (verifier: unsupported claims are unconstructible)</a:t>
+SOURCES: EXP-2026-09-007 (holdout n=288; grader qwen38-27B-v2; gemma4-31B agrees on ordering) · EXP-2026-09-016 A-1/A-3/A-4 (cost, 284-question dev half, measured not estimated; the earlier 40,000× is withdrawn — see docs/pitch/numbers-audit-2026-09-10.md) · EXP-2026-08-016 (240 probes) · EXP-2026-08-014 (verifier: unsupported claims are unconstructible)</a:t>
             </a:r>
             <a:endParaRPr lang="en-US" dirty="0"/>
           </a:p>
@@ -2122,7 +2122,7 @@
 First run: nothing. Five generic fixes later, reading the schema retrieves the right records on two-thirds of the questions; hand-written queries on one in eight — on synthetic records shaped to the real schema.
 And the bridge. A DCSync relationship in that graph is ATT&amp;CK technique T1003.006. One question can now span your own graph and the public catalogues. And where there is no mapping, it refused — twelve out of twelve. Zero false claims.
 HOW: Reviewer 2's slide, and the practical-impact slide. Say 'synthetic records shaped to the real schema' out loud — if you don't, an engineer will ask and it will sound like you hid it. Read the example question in the amber box in an analyst's voice. If ReliaQuest engineers are in the room, look at them for 'customer data never has to leave the customer'.
-IF LONG, CUT: The 'first run: nothing' sentence — go straight to the 0.79.
+IF LONG, CUT: The 'first run: nothing' sentence — go straight to the 0.66. (Never say 0.79; that figure is superseded.)
 SOURCES: EXP-2026-08-011 A-10 (retrieval recall 0.657 vs 0.127, precision 0.136 vs 0.057; n=117, synthetic instances; five fixes in commit 74d027e; 1,250 MITRE tests unchanged) · EXP-2026-08-013 (bridge: 13 of 21 edges mapped; 12/12 refusals) · docs/research/datasets/cards/reliaquest-identity-catalog.md</a:t>
             </a:r>
             <a:endParaRPr lang="en-US" dirty="0"/>
@@ -3505,7 +3505,7 @@
                           <a:ea typeface="Calibri" pitchFamily="34" charset="-122"/>
                           <a:cs typeface="Calibri" pitchFamily="34" charset="-120"/>
                         </a:rPr>
-                        <a:t>Reads the database's own structure (schema-assembled, no templates, no model)</a:t>
+                        <a:t>Reads the database's own structure (schema-assembled, no templates; no model writes a query)</a:t>
                       </a:r>
                       <a:endParaRPr lang="en-US" sz="1050" dirty="0">
                         <a:latin typeface="Calibri" charset="0"/>
@@ -4525,8 +4525,8 @@
         </p:nvSpPr>
         <p:spPr>
           <a:xfrm>
-            <a:off x="457200" y="3337560"/>
-            <a:ext cx="8229600" cy="1325880"/>
+            <a:off x="457200" y="3310128"/>
+            <a:ext cx="8229600" cy="1389888"/>
           </a:xfrm>
           <a:prstGeom prst="rect">
             <a:avLst/>
@@ -4545,7 +4545,7 @@
               <a:buNone/>
             </a:pPr>
             <a:r>
-              <a:rPr lang="en-US" sz="1000" b="1" dirty="0">
+              <a:rPr lang="en-US" sz="800" b="1" dirty="0">
                 <a:solidFill>
                   <a:srgbClr val="F3F6FA"/>
                 </a:solidFill>
@@ -4562,7 +4562,7 @@
               <a:buNone/>
             </a:pPr>
             <a:r>
-              <a:rPr lang="en-US" sz="1000" dirty="0">
+              <a:rPr lang="en-US" sz="800" dirty="0">
                 <a:solidFill>
                   <a:srgbClr val="9AAABE"/>
                 </a:solidFill>
@@ -4582,7 +4582,7 @@
               <a:buNone/>
             </a:pPr>
             <a:r>
-              <a:rPr lang="en-US" sz="1000" b="1" dirty="0">
+              <a:rPr lang="en-US" sz="800" b="1" dirty="0">
                 <a:solidFill>
                   <a:srgbClr val="F3F6FA"/>
                 </a:solidFill>
@@ -4599,7 +4599,7 @@
               <a:buNone/>
             </a:pPr>
             <a:r>
-              <a:rPr lang="en-US" sz="1000" dirty="0">
+              <a:rPr lang="en-US" sz="800" dirty="0">
                 <a:solidFill>
                   <a:srgbClr val="9AAABE"/>
                 </a:solidFill>
@@ -4607,7 +4607,7 @@
                 <a:ea typeface="Calibri" pitchFamily="34" charset="-122"/>
                 <a:cs typeface="Calibri" pitchFamily="34" charset="-120"/>
               </a:rPr>
-              <a:t>hand-written ≈ 4 s for 284 questions; AI-written ≈ 2 days of machine time (five attempts to make the baseline fair, all recorded).</a:t>
+              <a:t>same 284 questions, 24 workers, one machine, wall clock throughout — hand-written 8 s / 0 model calls · schema-assembled 19.5 min / 144× / 159 calls · AI-written 3.2 h / 1,408× / 413 calls. One worker, one analyst waiting: 0.006 s vs 182 s median per question. The AI-written path returned evidence on 96 of 284. The earlier “4 s vs 2 days / 40,000×” divided one path’s wall clock by another’s summed machine time; withdrawn (EXP-2026-09-016 A-2).</a:t>
             </a:r>
             <a:endParaRPr lang="en-US" sz="1000" dirty="0"/>
           </a:p>
@@ -4619,7 +4619,7 @@
               <a:buNone/>
             </a:pPr>
             <a:r>
-              <a:rPr lang="en-US" sz="1000" b="1" dirty="0">
+              <a:rPr lang="en-US" sz="800" b="1" dirty="0">
                 <a:solidFill>
                   <a:srgbClr val="F3F6FA"/>
                 </a:solidFill>
@@ -4636,7 +4636,7 @@
               <a:buNone/>
             </a:pPr>
             <a:r>
-              <a:rPr lang="en-US" sz="1000" dirty="0">
+              <a:rPr lang="en-US" sz="800" dirty="0">
                 <a:solidFill>
                   <a:srgbClr val="9AAABE"/>
                 </a:solidFill>
@@ -4645,6 +4645,43 @@
                 <a:cs typeface="Calibri" pitchFamily="34" charset="-120"/>
               </a:rPr>
               <a:t>July's 120 questions were co-authored with the code (bias measured at +0.03 to +0.05, same system, same grader). These are blind and hard on purpose. The finding is the ordering, which survives two grader families.</a:t>
+            </a:r>
+            <a:endParaRPr lang="en-US" sz="1000" dirty="0"/>
+          </a:p>
+          <a:p>
+            <a:pPr indent="0" marL="0">
+              <a:spcAft>
+                <a:spcPts val="400"/>
+              </a:spcAft>
+              <a:buNone/>
+            </a:pPr>
+            <a:r>
+              <a:rPr lang="en-US" sz="800" b="1" dirty="0">
+                <a:solidFill>
+                  <a:srgbClr val="F3F6FA"/>
+                </a:solidFill>
+                <a:latin typeface="Calibri" pitchFamily="34" charset="0"/>
+                <a:ea typeface="Calibri" pitchFamily="34" charset="-122"/>
+                <a:cs typeface="Calibri" pitchFamily="34" charset="-120"/>
+              </a:rPr>
+              <a:t>Cross-checks: </a:t>
+            </a:r>
+            <a:pPr indent="0" marL="0">
+              <a:spcAft>
+                <a:spcPts val="400"/>
+              </a:spcAft>
+              <a:buNone/>
+            </a:pPr>
+            <a:r>
+              <a:rPr lang="en-US" sz="800" dirty="0">
+                <a:solidFill>
+                  <a:srgbClr val="9AAABE"/>
+                </a:solidFill>
+                <a:latin typeface="Calibri" pitchFamily="34" charset="0"/>
+                <a:ea typeface="Calibri" pitchFamily="34" charset="-122"/>
+                <a:cs typeface="Calibri" pitchFamily="34" charset="-120"/>
+              </a:rPr>
+              <a:t>SD 0.0074 over six seeds on the schema-assembled path, the +0.168 gap 7.3× its three-SD band (EXP-2026-09-011); SD 0.0089 over three seeds on the AI-written path (EXP-2026-09-009). The AI-written path reads 0.4043 on the dev half against 0.4039 on the holdout — 0.0004 apart, a different question set five days later (EXP-2026-09-016 A-5).</a:t>
             </a:r>
             <a:endParaRPr lang="en-US" sz="1000" dirty="0"/>
           </a:p>
@@ -4683,7 +4720,7 @@
                 <a:ea typeface="Calibri" pitchFamily="34" charset="-122"/>
                 <a:cs typeface="Calibri" pitchFamily="34" charset="-120"/>
               </a:rPr>
-              <a:t>Sources: EXP-2026-09-007 data/judged-two-family-final.json (final) · EXP-2026-09-007/RESULTS.md (CIs) · docs/reports/2026-09-06-overnight-report.md · docs/reports/2026-09-05-full-report.md · C-021 (co-authorship bias)</a:t>
+              <a:t>Sources: EXP-2026-09-007 data/judged-two-family-final.json (final) · EXP-2026-09-007/RESULTS.md (CIs) · docs/research/reports/2026-09-06-overnight-report.md · EXP-2026-09-016 (cost, measured) · C-021 (co-authorship bias)</a:t>
             </a:r>
             <a:endParaRPr lang="en-US" sz="850" dirty="0"/>
           </a:p>
@@ -5201,6 +5238,10 @@
             <a:prstDash val="solid"/>
           </a:ln>
         </p:spPr>
+        <p:txBody>
+          <a:bodyPr/>
+          <a:p/>
+        </p:txBody>
       </p:sp>
       <p:sp>
         <p:nvSpPr>
@@ -5416,6 +5457,10 @@
             <a:prstDash val="solid"/>
           </a:ln>
         </p:spPr>
+        <p:txBody>
+          <a:bodyPr/>
+          <a:p/>
+        </p:txBody>
       </p:sp>
       <p:sp>
         <p:nvSpPr>
@@ -5896,6 +5941,10 @@
             <a:prstDash val="solid"/>
           </a:ln>
         </p:spPr>
+        <p:txBody>
+          <a:bodyPr/>
+          <a:p/>
+        </p:txBody>
       </p:sp>
       <p:sp>
         <p:nvSpPr>
@@ -6628,6 +6677,10 @@
             <a:prstDash val="solid"/>
           </a:ln>
         </p:spPr>
+        <p:txBody>
+          <a:bodyPr/>
+          <a:p/>
+        </p:txBody>
       </p:sp>
       <p:pic>
         <p:nvPicPr>
@@ -6735,6 +6788,10 @@
             <a:prstDash val="solid"/>
           </a:ln>
         </p:spPr>
+        <p:txBody>
+          <a:bodyPr/>
+          <a:p/>
+        </p:txBody>
       </p:sp>
       <p:pic>
         <p:nvPicPr>
@@ -6842,6 +6899,10 @@
             <a:prstDash val="solid"/>
           </a:ln>
         </p:spPr>
+        <p:txBody>
+          <a:bodyPr/>
+          <a:p/>
+        </p:txBody>
       </p:sp>
       <p:pic>
         <p:nvPicPr>
@@ -7219,6 +7280,10 @@
             <a:prstDash val="solid"/>
           </a:ln>
         </p:spPr>
+        <p:txBody>
+          <a:bodyPr/>
+          <a:p/>
+        </p:txBody>
       </p:sp>
       <p:pic>
         <p:nvPicPr>
@@ -7418,6 +7483,10 @@
             <a:prstDash val="solid"/>
           </a:ln>
         </p:spPr>
+        <p:txBody>
+          <a:bodyPr/>
+          <a:p/>
+        </p:txBody>
       </p:sp>
       <p:sp>
         <p:nvSpPr>
@@ -7443,6 +7512,10 @@
             <a:prstDash val="solid"/>
           </a:ln>
         </p:spPr>
+        <p:txBody>
+          <a:bodyPr/>
+          <a:p/>
+        </p:txBody>
       </p:sp>
       <p:pic>
         <p:nvPicPr>
@@ -7611,6 +7684,10 @@
             <a:prstDash val="solid"/>
           </a:ln>
         </p:spPr>
+        <p:txBody>
+          <a:bodyPr/>
+          <a:p/>
+        </p:txBody>
       </p:sp>
       <p:sp>
         <p:nvSpPr>
@@ -7636,6 +7713,10 @@
             <a:prstDash val="solid"/>
           </a:ln>
         </p:spPr>
+        <p:txBody>
+          <a:bodyPr/>
+          <a:p/>
+        </p:txBody>
       </p:sp>
       <p:pic>
         <p:nvPicPr>
@@ -7804,6 +7885,10 @@
             <a:prstDash val="solid"/>
           </a:ln>
         </p:spPr>
+        <p:txBody>
+          <a:bodyPr/>
+          <a:p/>
+        </p:txBody>
       </p:sp>
       <p:sp>
         <p:nvSpPr>
@@ -7829,6 +7914,10 @@
             <a:prstDash val="solid"/>
           </a:ln>
         </p:spPr>
+        <p:txBody>
+          <a:bodyPr/>
+          <a:p/>
+        </p:txBody>
       </p:sp>
       <p:pic>
         <p:nvPicPr>
@@ -7997,6 +8086,10 @@
             <a:prstDash val="solid"/>
           </a:ln>
         </p:spPr>
+        <p:txBody>
+          <a:bodyPr/>
+          <a:p/>
+        </p:txBody>
       </p:sp>
       <p:sp>
         <p:nvSpPr>
@@ -8022,6 +8115,10 @@
             <a:prstDash val="solid"/>
           </a:ln>
         </p:spPr>
+        <p:txBody>
+          <a:bodyPr/>
+          <a:p/>
+        </p:txBody>
       </p:sp>
       <p:pic>
         <p:nvPicPr>
@@ -8151,6 +8248,10 @@
             <a:prstDash val="solid"/>
           </a:ln>
         </p:spPr>
+        <p:txBody>
+          <a:bodyPr/>
+          <a:p/>
+        </p:txBody>
       </p:sp>
       <p:pic>
         <p:nvPicPr>
@@ -8241,6 +8342,10 @@
             <a:prstDash val="solid"/>
           </a:ln>
         </p:spPr>
+        <p:txBody>
+          <a:bodyPr/>
+          <a:p/>
+        </p:txBody>
       </p:sp>
       <p:pic>
         <p:nvPicPr>
@@ -8465,6 +8570,10 @@
             <a:prstDash val="solid"/>
           </a:ln>
         </p:spPr>
+        <p:txBody>
+          <a:bodyPr/>
+          <a:p/>
+        </p:txBody>
       </p:sp>
       <p:sp>
         <p:nvSpPr>
@@ -8607,6 +8716,10 @@
             <a:prstDash val="solid"/>
           </a:ln>
         </p:spPr>
+        <p:txBody>
+          <a:bodyPr/>
+          <a:p/>
+        </p:txBody>
       </p:sp>
       <p:sp>
         <p:nvSpPr>
@@ -8768,6 +8881,10 @@
             <a:prstDash val="solid"/>
           </a:ln>
         </p:spPr>
+        <p:txBody>
+          <a:bodyPr/>
+          <a:p/>
+        </p:txBody>
       </p:sp>
       <p:sp>
         <p:nvSpPr>
@@ -8834,6 +8951,10 @@
             <a:prstDash val="solid"/>
           </a:ln>
         </p:spPr>
+        <p:txBody>
+          <a:bodyPr/>
+          <a:p/>
+        </p:txBody>
       </p:sp>
       <p:sp>
         <p:nvSpPr>
@@ -8900,6 +9021,10 @@
             <a:prstDash val="solid"/>
           </a:ln>
         </p:spPr>
+        <p:txBody>
+          <a:bodyPr/>
+          <a:p/>
+        </p:txBody>
       </p:sp>
       <p:sp>
         <p:nvSpPr>
@@ -8966,6 +9091,10 @@
             <a:prstDash val="solid"/>
           </a:ln>
         </p:spPr>
+        <p:txBody>
+          <a:bodyPr/>
+          <a:p/>
+        </p:txBody>
       </p:sp>
       <p:sp>
         <p:nvSpPr>
@@ -9032,6 +9161,10 @@
             <a:prstDash val="solid"/>
           </a:ln>
         </p:spPr>
+        <p:txBody>
+          <a:bodyPr/>
+          <a:p/>
+        </p:txBody>
       </p:sp>
       <p:pic>
         <p:nvPicPr>
@@ -9391,6 +9524,10 @@
             <a:prstDash val="solid"/>
           </a:ln>
         </p:spPr>
+        <p:txBody>
+          <a:bodyPr/>
+          <a:p/>
+        </p:txBody>
       </p:sp>
       <p:graphicFrame>
         <p:nvGraphicFramePr>
@@ -9473,6 +9610,10 @@
             <a:prstDash val="solid"/>
           </a:ln>
         </p:spPr>
+        <p:txBody>
+          <a:bodyPr/>
+          <a:p/>
+        </p:txBody>
       </p:sp>
       <p:sp>
         <p:nvSpPr>
@@ -9507,7 +9648,7 @@
                 <a:ea typeface="Calibri" pitchFamily="34" charset="-122"/>
                 <a:cs typeface="Calibri" pitchFamily="34" charset="-120"/>
               </a:rPr>
-              <a:t>4 s vs 2 days</a:t>
+              <a:t>1,400×</a:t>
             </a:r>
             <a:endParaRPr lang="en-US" sz="2400" dirty="0"/>
           </a:p>
@@ -9546,7 +9687,7 @@
                 <a:ea typeface="Calibri" pitchFamily="34" charset="-122"/>
                 <a:cs typeface="Calibri" pitchFamily="34" charset="-120"/>
               </a:rPr>
-              <a:t>hand-written vs AI-written queries, same questions</a:t>
+              <a:t>cost of letting the AI write the query — same questions, same machine</a:t>
             </a:r>
             <a:endParaRPr lang="en-US" sz="1050" dirty="0"/>
           </a:p>
@@ -9578,6 +9719,10 @@
             <a:prstDash val="solid"/>
           </a:ln>
         </p:spPr>
+        <p:txBody>
+          <a:bodyPr/>
+          <a:p/>
+        </p:txBody>
       </p:sp>
       <p:sp>
         <p:nvSpPr>
@@ -9683,6 +9828,10 @@
             <a:prstDash val="solid"/>
           </a:ln>
         </p:spPr>
+        <p:txBody>
+          <a:bodyPr/>
+          <a:p/>
+        </p:txBody>
       </p:sp>
       <p:sp>
         <p:nvSpPr>
@@ -9883,6 +10032,10 @@
             <a:prstDash val="solid"/>
           </a:ln>
         </p:spPr>
+        <p:txBody>
+          <a:bodyPr/>
+          <a:p/>
+        </p:txBody>
       </p:sp>
       <p:sp>
         <p:nvSpPr>
@@ -9910,6 +10063,10 @@
             <a:prstDash val="solid"/>
           </a:ln>
         </p:spPr>
+        <p:txBody>
+          <a:bodyPr/>
+          <a:p/>
+        </p:txBody>
       </p:sp>
       <p:pic>
         <p:nvPicPr>
@@ -10013,6 +10170,10 @@
             <a:prstDash val="dash"/>
           </a:ln>
         </p:spPr>
+        <p:txBody>
+          <a:bodyPr/>
+          <a:p/>
+        </p:txBody>
       </p:sp>
       <p:sp>
         <p:nvSpPr>
@@ -10040,6 +10201,10 @@
             <a:prstDash val="solid"/>
           </a:ln>
         </p:spPr>
+        <p:txBody>
+          <a:bodyPr/>
+          <a:p/>
+        </p:txBody>
       </p:sp>
       <p:pic>
         <p:nvPicPr>
@@ -10143,6 +10308,10 @@
             <a:prstDash val="dash"/>
           </a:ln>
         </p:spPr>
+        <p:txBody>
+          <a:bodyPr/>
+          <a:p/>
+        </p:txBody>
       </p:sp>
       <p:sp>
         <p:nvSpPr>
@@ -10170,6 +10339,10 @@
             <a:prstDash val="solid"/>
           </a:ln>
         </p:spPr>
+        <p:txBody>
+          <a:bodyPr/>
+          <a:p/>
+        </p:txBody>
       </p:sp>
       <p:pic>
         <p:nvPicPr>
@@ -10273,6 +10446,10 @@
             <a:prstDash val="dash"/>
           </a:ln>
         </p:spPr>
+        <p:txBody>
+          <a:bodyPr/>
+          <a:p/>
+        </p:txBody>
       </p:sp>
       <p:sp>
         <p:nvSpPr>
@@ -10296,6 +10473,10 @@
             <a:prstDash val="dash"/>
           </a:ln>
         </p:spPr>
+        <p:txBody>
+          <a:bodyPr/>
+          <a:p/>
+        </p:txBody>
       </p:sp>
       <p:sp>
         <p:nvSpPr>
@@ -10319,6 +10500,10 @@
             <a:prstDash val="dash"/>
           </a:ln>
         </p:spPr>
+        <p:txBody>
+          <a:bodyPr/>
+          <a:p/>
+        </p:txBody>
       </p:sp>
       <p:sp>
         <p:nvSpPr>
@@ -10344,6 +10529,10 @@
             <a:prstDash val="solid"/>
           </a:ln>
         </p:spPr>
+        <p:txBody>
+          <a:bodyPr/>
+          <a:p/>
+        </p:txBody>
       </p:sp>
       <p:pic>
         <p:nvPicPr>
@@ -10434,6 +10623,10 @@
             <a:prstDash val="solid"/>
           </a:ln>
         </p:spPr>
+        <p:txBody>
+          <a:bodyPr/>
+          <a:p/>
+        </p:txBody>
       </p:sp>
       <p:sp>
         <p:nvSpPr>
@@ -10539,6 +10732,10 @@
             <a:prstDash val="solid"/>
           </a:ln>
         </p:spPr>
+        <p:txBody>
+          <a:bodyPr/>
+          <a:p/>
+        </p:txBody>
       </p:sp>
       <p:sp>
         <p:nvSpPr>
@@ -10644,6 +10841,10 @@
             <a:prstDash val="solid"/>
           </a:ln>
         </p:spPr>
+        <p:txBody>
+          <a:bodyPr/>
+          <a:p/>
+        </p:txBody>
       </p:sp>
       <p:sp>
         <p:nvSpPr>
@@ -10844,6 +11045,10 @@
             <a:prstDash val="solid"/>
           </a:ln>
         </p:spPr>
+        <p:txBody>
+          <a:bodyPr/>
+          <a:p/>
+        </p:txBody>
       </p:sp>
       <p:pic>
         <p:nvPicPr>
@@ -11168,6 +11373,10 @@
             <a:prstDash val="solid"/>
           </a:ln>
         </p:spPr>
+        <p:txBody>
+          <a:bodyPr/>
+          <a:p/>
+        </p:txBody>
       </p:sp>
       <p:pic>
         <p:nvPicPr>
@@ -11414,6 +11623,10 @@
             <a:prstDash val="solid"/>
           </a:ln>
         </p:spPr>
+        <p:txBody>
+          <a:bodyPr/>
+          <a:p/>
+        </p:txBody>
       </p:sp>
       <p:pic>
         <p:nvPicPr>
@@ -11716,6 +11929,10 @@
             <a:prstDash val="solid"/>
           </a:ln>
         </p:spPr>
+        <p:txBody>
+          <a:bodyPr/>
+          <a:p/>
+        </p:txBody>
       </p:sp>
       <p:sp>
         <p:nvSpPr>
@@ -11977,6 +12194,10 @@
             <a:prstDash val="solid"/>
           </a:ln>
         </p:spPr>
+        <p:txBody>
+          <a:bodyPr/>
+          <a:p/>
+        </p:txBody>
       </p:sp>
       <p:sp>
         <p:nvSpPr>
@@ -12002,6 +12223,10 @@
             <a:prstDash val="solid"/>
           </a:ln>
         </p:spPr>
+        <p:txBody>
+          <a:bodyPr/>
+          <a:p/>
+        </p:txBody>
       </p:sp>
       <p:sp>
         <p:nvSpPr>
@@ -12131,6 +12356,10 @@
             <a:prstDash val="solid"/>
           </a:ln>
         </p:spPr>
+        <p:txBody>
+          <a:bodyPr/>
+          <a:p/>
+        </p:txBody>
       </p:sp>
       <p:sp>
         <p:nvSpPr>
@@ -12156,6 +12385,10 @@
             <a:prstDash val="solid"/>
           </a:ln>
         </p:spPr>
+        <p:txBody>
+          <a:bodyPr/>
+          <a:p/>
+        </p:txBody>
       </p:sp>
       <p:sp>
         <p:nvSpPr>
@@ -12285,6 +12518,10 @@
             <a:prstDash val="solid"/>
           </a:ln>
         </p:spPr>
+        <p:txBody>
+          <a:bodyPr/>
+          <a:p/>
+        </p:txBody>
       </p:sp>
       <p:sp>
         <p:nvSpPr>
@@ -12310,6 +12547,10 @@
             <a:prstDash val="solid"/>
           </a:ln>
         </p:spPr>
+        <p:txBody>
+          <a:bodyPr/>
+          <a:p/>
+        </p:txBody>
       </p:sp>
       <p:sp>
         <p:nvSpPr>
@@ -12439,6 +12680,10 @@
             <a:prstDash val="solid"/>
           </a:ln>
         </p:spPr>
+        <p:txBody>
+          <a:bodyPr/>
+          <a:p/>
+        </p:txBody>
       </p:sp>
       <p:sp>
         <p:nvSpPr>
@@ -12464,6 +12709,10 @@
             <a:prstDash val="solid"/>
           </a:ln>
         </p:spPr>
+        <p:txBody>
+          <a:bodyPr/>
+          <a:p/>
+        </p:txBody>
       </p:sp>
       <p:sp>
         <p:nvSpPr>
